--- a/master/Diploma/presentation/OnyushevA_RK6-41M_v2.pptx
+++ b/master/Diploma/presentation/OnyushevA_RK6-41M_v2.pptx
@@ -1650,7 +1650,33 @@
             </a:r>
           </a:p>
           <a:p>
-            <a:endParaRPr lang="ru-RU" sz="1800" dirty="0"/>
+            <a:br>
+              <a:rPr lang="en-US" sz="1800" dirty="0"/>
+            </a:br>
+            <a:r>
+              <a:rPr lang="ru-RU" sz="1800" dirty="0"/>
+              <a:t>По результату многочисленных исследований было решено использовать </a:t>
+            </a:r>
+            <a:r>
+              <a:rPr lang="en-US" sz="1800" dirty="0" err="1"/>
+              <a:t>crf</a:t>
+            </a:r>
+            <a:r>
+              <a:rPr lang="en-US" sz="1800" dirty="0"/>
+              <a:t> 28 </a:t>
+            </a:r>
+            <a:r>
+              <a:rPr lang="ru-RU" sz="1800" dirty="0"/>
+              <a:t>и кодек </a:t>
+            </a:r>
+            <a:r>
+              <a:rPr lang="en-US" sz="1800" dirty="0"/>
+              <a:t>H.265</a:t>
+            </a:r>
+            <a:r>
+              <a:rPr lang="ru-RU" sz="1800" dirty="0"/>
+              <a:t>. Такое сочетание дает оптимальное соотношение визуального качества, занятого места на диске и процессорного времени.</a:t>
+            </a:r>
           </a:p>
         </p:txBody>
       </p:sp>
